--- a/Latent_Heterogeneity_Presentation.pptx
+++ b/Latent_Heterogeneity_Presentation.pptx
@@ -10106,140 +10106,13 @@
       </p:sp>
       <p:sp>
         <p:nvSpPr>
-          <p:cNvPr id="9" name="Shape 7"/>
-          <p:cNvSpPr/>
-          <p:nvPr/>
-        </p:nvSpPr>
-        <p:spPr>
-          <a:xfrm>
-            <a:off x="2148840" y="1115568"/>
-            <a:ext cx="1645920" cy="1005840"/>
-          </a:xfrm>
-          <a:prstGeom prst="rect">
-            <a:avLst/>
-          </a:prstGeom>
-          <a:solidFill>
-            <a:srgbClr val="D6E4F0"/>
-          </a:solidFill>
-          <a:ln w="15240">
-            <a:solidFill>
-              <a:srgbClr val="B83232"/>
-            </a:solidFill>
-            <a:prstDash val="solid"/>
-          </a:ln>
-        </p:spPr>
-        <p:txBody>
-          <a:bodyPr/>
-          <a:lstStyle/>
-          <a:p>
-            <a:endParaRPr lang="en-US"/>
-          </a:p>
-        </p:txBody>
-      </p:sp>
-      <p:sp>
-        <p:nvSpPr>
-          <p:cNvPr id="10" name="Text 8"/>
-          <p:cNvSpPr/>
-          <p:nvPr/>
-        </p:nvSpPr>
-        <p:spPr>
-          <a:xfrm>
-            <a:off x="2221992" y="1188720"/>
-            <a:ext cx="1499616" cy="553212"/>
-          </a:xfrm>
-          <a:prstGeom prst="rect">
-            <a:avLst/>
-          </a:prstGeom>
-          <a:noFill/>
-          <a:ln/>
-        </p:spPr>
-        <p:txBody>
-          <a:bodyPr wrap="square" lIns="0" tIns="0" rIns="0" bIns="0" rtlCol="0" anchor="b"/>
-          <a:lstStyle/>
-          <a:p>
-            <a:pPr marL="0" indent="0" algn="ctr">
-              <a:buNone/>
-            </a:pPr>
-            <a:r>
-              <a:rPr lang="en-US" sz="2800" b="1" dirty="0">
-                <a:solidFill>
-                  <a:srgbClr val="B83232"/>
-                </a:solidFill>
-                <a:latin typeface="Calibri" pitchFamily="34" charset="0"/>
-                <a:ea typeface="Calibri" pitchFamily="34" charset="-122"/>
-                <a:cs typeface="Calibri" pitchFamily="34" charset="-120"/>
-              </a:rPr>
-              <a:t>29</a:t>
-            </a:r>
-            <a:endParaRPr lang="en-US" sz="2800" dirty="0"/>
-          </a:p>
-        </p:txBody>
-      </p:sp>
-      <p:sp>
-        <p:nvSpPr>
-          <p:cNvPr id="11" name="Text 9"/>
-          <p:cNvSpPr/>
-          <p:nvPr/>
-        </p:nvSpPr>
-        <p:spPr>
-          <a:xfrm>
-            <a:off x="2221992" y="1668780"/>
-            <a:ext cx="1499616" cy="452628"/>
-          </a:xfrm>
-          <a:prstGeom prst="rect">
-            <a:avLst/>
-          </a:prstGeom>
-          <a:noFill/>
-          <a:ln/>
-        </p:spPr>
-        <p:txBody>
-          <a:bodyPr wrap="square" lIns="0" tIns="0" rIns="0" bIns="0" rtlCol="0" anchor="t"/>
-          <a:lstStyle/>
-          <a:p>
-            <a:pPr marL="0" indent="0" algn="ctr">
-              <a:buNone/>
-            </a:pPr>
-            <a:r>
-              <a:rPr lang="en-US" sz="1000" dirty="0">
-                <a:solidFill>
-                  <a:srgbClr val="4A5568"/>
-                </a:solidFill>
-                <a:latin typeface="Calibri" pitchFamily="34" charset="0"/>
-                <a:ea typeface="Calibri" pitchFamily="34" charset="-122"/>
-                <a:cs typeface="Calibri" pitchFamily="34" charset="-120"/>
-              </a:rPr>
-              <a:t>Death Events</a:t>
-            </a:r>
-            <a:endParaRPr lang="en-US" sz="1000" dirty="0"/>
-          </a:p>
-          <a:p>
-            <a:pPr marL="0" indent="0" algn="ctr">
-              <a:buNone/>
-            </a:pPr>
-            <a:r>
-              <a:rPr lang="en-US" sz="1000" dirty="0">
-                <a:solidFill>
-                  <a:srgbClr val="4A5568"/>
-                </a:solidFill>
-                <a:latin typeface="Calibri" pitchFamily="34" charset="0"/>
-                <a:ea typeface="Calibri" pitchFamily="34" charset="-122"/>
-                <a:cs typeface="Calibri" pitchFamily="34" charset="-120"/>
-              </a:rPr>
-              <a:t>(event-limited setting)</a:t>
-            </a:r>
-            <a:endParaRPr lang="en-US" sz="1000" dirty="0"/>
-          </a:p>
-        </p:txBody>
-      </p:sp>
-      <p:sp>
-        <p:nvSpPr>
           <p:cNvPr id="12" name="Shape 10"/>
           <p:cNvSpPr/>
           <p:nvPr/>
         </p:nvSpPr>
         <p:spPr>
           <a:xfrm>
-            <a:off x="3931920" y="1115568"/>
+            <a:off x="2320290" y="1133856"/>
             <a:ext cx="1645920" cy="1005840"/>
           </a:xfrm>
           <a:prstGeom prst="rect">
@@ -10271,7 +10144,7 @@
         </p:nvSpPr>
         <p:spPr>
           <a:xfrm>
-            <a:off x="4005072" y="1188720"/>
+            <a:off x="2393442" y="1120139"/>
             <a:ext cx="1499616" cy="553212"/>
           </a:xfrm>
           <a:prstGeom prst="rect">
@@ -10310,7 +10183,7 @@
         </p:nvSpPr>
         <p:spPr>
           <a:xfrm>
-            <a:off x="4005072" y="1668780"/>
+            <a:off x="2393442" y="1680209"/>
             <a:ext cx="1499616" cy="452628"/>
           </a:xfrm>
           <a:prstGeom prst="rect">
@@ -10366,7 +10239,7 @@
         </p:nvSpPr>
         <p:spPr>
           <a:xfrm>
-            <a:off x="5715000" y="1115568"/>
+            <a:off x="4251960" y="1126997"/>
             <a:ext cx="1645920" cy="1005840"/>
           </a:xfrm>
           <a:prstGeom prst="rect">
@@ -10398,7 +10271,7 @@
         </p:nvSpPr>
         <p:spPr>
           <a:xfrm>
-            <a:off x="5788152" y="1188720"/>
+            <a:off x="4178808" y="1140716"/>
             <a:ext cx="1499616" cy="553212"/>
           </a:xfrm>
           <a:prstGeom prst="rect">
@@ -10437,7 +10310,7 @@
         </p:nvSpPr>
         <p:spPr>
           <a:xfrm>
-            <a:off x="5788152" y="1668780"/>
+            <a:off x="4251960" y="1714500"/>
             <a:ext cx="1499616" cy="452628"/>
           </a:xfrm>
           <a:prstGeom prst="rect">
